--- a/public/plans/2026-05-18.pptx
+++ b/public/plans/2026-05-18.pptx
@@ -9439,7 +9439,7 @@
                 </a:solidFill>
                 <a:latin typeface="Calibri"/>
               </a:rPr>
-              <a:t>Ages 3–5  ·  45 minute session</a:t>
+              <a:t>Ages 3–5 · 45 minute session</a:t>
             </a:r>
           </a:p>
         </p:txBody>
@@ -9656,7 +9656,7 @@
                 </a:solidFill>
                 <a:latin typeface="Calibri"/>
               </a:rPr>
-              <a:t>COACH PLAYBOOK · PRE-K &amp; K</a:t>
+              <a:t>COACH PLAYBOOK · PRE-K &amp; KINDERGARTEN</a:t>
             </a:r>
           </a:p>
         </p:txBody>
@@ -12172,7 +12172,7 @@
                 </a:solidFill>
                 <a:latin typeface="Calibri"/>
               </a:rPr>
-              <a:t>qmtk Soccer · Coach Playbook · Pre-K &amp; K</a:t>
+              <a:t>qmtk Soccer · Coach Playbook · Pre-K &amp; Kindergarten</a:t>
             </a:r>
           </a:p>
         </p:txBody>
@@ -12389,7 +12389,7 @@
                 </a:solidFill>
                 <a:latin typeface="Calibri"/>
               </a:rPr>
-              <a:t>COACH PLAYBOOK · PRE-K &amp; K</a:t>
+              <a:t>COACH PLAYBOOK · PRE-K &amp; KINDERGARTEN</a:t>
             </a:r>
           </a:p>
         </p:txBody>
@@ -14905,7 +14905,7 @@
                 </a:solidFill>
                 <a:latin typeface="Calibri"/>
               </a:rPr>
-              <a:t>qmtk Soccer · Coach Playbook · Pre-K &amp; K</a:t>
+              <a:t>qmtk Soccer · Coach Playbook · Pre-K &amp; Kindergarten</a:t>
             </a:r>
           </a:p>
         </p:txBody>
@@ -15122,7 +15122,7 @@
                 </a:solidFill>
                 <a:latin typeface="Calibri"/>
               </a:rPr>
-              <a:t>COACH PLAYBOOK · PRE-K &amp; K</a:t>
+              <a:t>COACH PLAYBOOK · PRE-K &amp; KINDERGARTEN</a:t>
             </a:r>
           </a:p>
         </p:txBody>
@@ -17638,7 +17638,7 @@
                 </a:solidFill>
                 <a:latin typeface="Calibri"/>
               </a:rPr>
-              <a:t>qmtk Soccer · Coach Playbook · Pre-K &amp; K</a:t>
+              <a:t>qmtk Soccer · Coach Playbook · Pre-K &amp; Kindergarten</a:t>
             </a:r>
           </a:p>
         </p:txBody>
@@ -17855,7 +17855,7 @@
                 </a:solidFill>
                 <a:latin typeface="Calibri"/>
               </a:rPr>
-              <a:t>COACH PLAYBOOK · PRE-K &amp; K</a:t>
+              <a:t>COACH PLAYBOOK · PRE-K &amp; KINDERGARTEN</a:t>
             </a:r>
           </a:p>
         </p:txBody>
@@ -20250,7 +20250,7 @@
                 </a:solidFill>
                 <a:latin typeface="Calibri"/>
               </a:rPr>
-              <a:t>qmtk Soccer · Coach Playbook · Pre-K &amp; K</a:t>
+              <a:t>qmtk Soccer · Coach Playbook · Pre-K &amp; Kindergarten</a:t>
             </a:r>
           </a:p>
         </p:txBody>
@@ -20580,7 +20580,7 @@
                 </a:solidFill>
                 <a:latin typeface="Calibri"/>
               </a:rPr>
-              <a:t>Ages 6–11  ·  60 minute session</a:t>
+              <a:t>Ages 6–11 · 60 minute session</a:t>
             </a:r>
           </a:p>
         </p:txBody>
